--- a/public/fun/pack/pptx/talkpro/발표템플릿프리미엄_37_교육·강의_시나몬로즈.pptx
+++ b/public/fun/pack/pptx/talkpro/발표템플릿프리미엄_37_교육·강의_시나몬로즈.pptx
@@ -115,12 +115,12 @@
   <p:extLst>
     <p:ext uri="{521415D9-36F7-43E2-AB2F-B90AF26B5E84}">
       <p14:sectionLst xmlns:p14="http://schemas.microsoft.com/office/powerpoint/2010/main">
-        <p14:section name="시작" id="{3220300F-0085-44F3-AD0F-FA20240F221D}">
+        <p14:section name="시작" id="{5B4B7F10-FE72-4D35-8EE2-6A8A105B3D1C}">
           <p14:sldIdLst>
             <p14:sldId id="256"/>
           </p14:sldIdLst>
         </p14:section>
-        <p14:section name="본문" id="{A08E4211-0ACD-47F3-B2A5-D96C96FE1608}">
+        <p14:section name="본문" id="{3D30532F-D32D-4EEC-BEB4-DAFE455E49BE}">
           <p14:sldIdLst>
             <p14:sldId id="257"/>
             <p14:sldId id="258"/>
@@ -131,7 +131,7 @@
             <p14:sldId id="263"/>
           </p14:sldIdLst>
         </p14:section>
-        <p14:section name="마무리" id="{D775BF98-35BA-4B58-81A3-667F7727BF12}">
+        <p14:section name="마무리" id="{9E33528B-B7B3-475A-B551-3634BDB961DF}">
           <p14:sldIdLst>
             <p14:sldId id="264"/>
           </p14:sldIdLst>
@@ -1907,7 +1907,7 @@
             </a:lvl1pPr>
           </a:lstStyle>
           <a:p>
-            <a:fld id="{8B4C8444-A2F9-4000-B483-6FE2CAE13BB4}" type="slidenum">
+            <a:fld id="{7CE66415-1CF0-4404-8D91-071D125F03DF}" type="slidenum">
               <a:rPr lang="en-US"/>
               <a:t>‹#›</a:t>
             </a:fld>
@@ -2583,7 +2583,7 @@
             </a:lvl1pPr>
           </a:lstStyle>
           <a:p>
-            <a:fld id="{44AC986F-9D24-4FB2-8EF7-AAE6A95A173C}" type="slidenum">
+            <a:fld id="{3E03366F-DFDF-4FEB-B9AE-365B6738E00A}" type="slidenum">
               <a:rPr lang="en-US"/>
               <a:t>‹#›</a:t>
             </a:fld>
@@ -3261,7 +3261,7 @@
             </a:lvl1pPr>
           </a:lstStyle>
           <a:p>
-            <a:fld id="{B6E4623A-60CE-4A64-BBF9-6D9DA58088A3}" type="slidenum">
+            <a:fld id="{6213E407-1EF9-4194-B278-52122AD6F723}" type="slidenum">
               <a:rPr lang="en-US"/>
               <a:t>‹#›</a:t>
             </a:fld>
@@ -4130,7 +4130,7 @@
           <a:p>
             <a:r>
               <a:rPr lang="ko-KR"/>
-              <a:t>0000. 00. 00</a:t>
+              <a:t>날짜 입력</a:t>
             </a:r>
           </a:p>
         </p:txBody>
@@ -4215,7 +4215,7 @@
           <a:bodyPr/>
           <a:lstStyle/>
           <a:p>
-            <a:fld id="{43725F53-E3A1-471A-9F0F-9555CB029952}" type="slidenum">
+            <a:fld id="{5C0246AF-2551-4C5C-9B37-5DAA725AEA2D}" type="slidenum">
               <a:rPr lang="en-US"/>
               <a:t>‹#›</a:t>
             </a:fld>
@@ -5401,7 +5401,7 @@
           <a:bodyPr/>
           <a:lstStyle/>
           <a:p>
-            <a:fld id="{C7F44758-0969-44C8-AD8F-5FCF45193261}" type="slidenum">
+            <a:fld id="{32E41551-C7F4-4007-8027-F4A363814951}" type="slidenum">
               <a:rPr lang="en-US"/>
               <a:t>‹#›</a:t>
             </a:fld>
@@ -5489,7 +5489,7 @@
           <a:bodyPr/>
           <a:lstStyle/>
           <a:p>
-            <a:fld id="{449D12B0-2167-45A4-A5F2-18788EE54F87}" type="slidenum">
+            <a:fld id="{F50FCEDB-3D55-431A-9233-AFCDD8C8BDDD}" type="slidenum">
               <a:rPr lang="en-US"/>
               <a:t>‹#›</a:t>
             </a:fld>
@@ -6450,7 +6450,7 @@
           <a:bodyPr/>
           <a:lstStyle/>
           <a:p>
-            <a:fld id="{D94F9511-0520-4C42-9884-FF6526EF9300}" type="slidenum">
+            <a:fld id="{280E8771-8164-4658-AB8F-794E3F59C948}" type="slidenum">
               <a:rPr lang="en-US"/>
               <a:t>‹#›</a:t>
             </a:fld>
@@ -7090,7 +7090,7 @@
           <a:bodyPr/>
           <a:lstStyle/>
           <a:p>
-            <a:fld id="{A2BC7683-4120-4F16-8B6B-A909B37F2CE5}" type="slidenum">
+            <a:fld id="{4746F9B5-BD1C-439B-93CC-64C9E0A84AD2}" type="slidenum">
               <a:rPr lang="en-US"/>
               <a:t>‹#›</a:t>
             </a:fld>
@@ -7273,7 +7273,7 @@
           <a:bodyPr/>
           <a:lstStyle/>
           <a:p>
-            <a:fld id="{BFD3B46D-C062-49E6-B056-A00DE95A3BA8}" type="slidenum">
+            <a:fld id="{495E8CE9-62BD-48D4-B803-73F4A4E0165C}" type="slidenum">
               <a:rPr lang="en-US"/>
               <a:t>‹#›</a:t>
             </a:fld>
@@ -8337,7 +8337,7 @@
           <a:bodyPr/>
           <a:lstStyle/>
           <a:p>
-            <a:fld id="{448330A6-FFED-4E6F-AF10-8FCFA4368705}" type="slidenum">
+            <a:fld id="{6B7158D6-A22E-4BEC-92A2-856DCB46953A}" type="slidenum">
               <a:rPr lang="en-US"/>
               <a:t>‹#›</a:t>
             </a:fld>
